--- a/slides/4_applications.pptx
+++ b/slides/4_applications.pptx
@@ -5,12 +5,18 @@
     <p:sldMasterId id="2147483648" r:id="rId1"/>
   </p:sldMasterIdLst>
   <p:notesMasterIdLst>
-    <p:notesMasterId r:id="rId5"/>
+    <p:notesMasterId r:id="rId11"/>
   </p:notesMasterIdLst>
   <p:sldIdLst>
     <p:sldId id="256" r:id="rId2"/>
-    <p:sldId id="267" r:id="rId3"/>
-    <p:sldId id="266" r:id="rId4"/>
+    <p:sldId id="272" r:id="rId3"/>
+    <p:sldId id="267" r:id="rId4"/>
+    <p:sldId id="273" r:id="rId5"/>
+    <p:sldId id="268" r:id="rId6"/>
+    <p:sldId id="270" r:id="rId7"/>
+    <p:sldId id="266" r:id="rId8"/>
+    <p:sldId id="269" r:id="rId9"/>
+    <p:sldId id="271" r:id="rId10"/>
   </p:sldIdLst>
   <p:sldSz cx="12192000" cy="6858000"/>
   <p:notesSz cx="6858000" cy="9144000"/>
@@ -481,7 +487,7 @@
           <a:p>
             <a:fld id="{506E0FD1-891F-4B1E-916D-E9B585160BB8}" type="datetimeFigureOut">
               <a:rPr lang="en-GB" smtClean="0"/>
-              <a:t>26/01/2026</a:t>
+              <a:t>03/03/2026</a:t>
             </a:fld>
             <a:endParaRPr lang="en-GB"/>
           </a:p>
@@ -898,7 +904,7 @@
           <a:p>
             <a:fld id="{D68C3F22-27B2-44E3-9C5F-D08126455F6F}" type="datetime1">
               <a:rPr lang="en-GB" smtClean="0"/>
-              <a:t>26/01/2026</a:t>
+              <a:t>03/03/2026</a:t>
             </a:fld>
             <a:endParaRPr lang="en-GB"/>
           </a:p>
@@ -1098,7 +1104,7 @@
           <a:p>
             <a:fld id="{1CD03846-7BF6-4FB6-A921-FF3379ADBD4C}" type="datetime1">
               <a:rPr lang="en-GB" smtClean="0"/>
-              <a:t>26/01/2026</a:t>
+              <a:t>03/03/2026</a:t>
             </a:fld>
             <a:endParaRPr lang="en-GB"/>
           </a:p>
@@ -1308,7 +1314,7 @@
           <a:p>
             <a:fld id="{99E1B91A-3FD0-4144-9C84-63E9688ED2FE}" type="datetime1">
               <a:rPr lang="en-GB" smtClean="0"/>
-              <a:t>26/01/2026</a:t>
+              <a:t>03/03/2026</a:t>
             </a:fld>
             <a:endParaRPr lang="en-GB"/>
           </a:p>
@@ -1508,7 +1514,7 @@
           <a:p>
             <a:fld id="{5295ED7B-FEAD-4734-819F-93EF4B0EA908}" type="datetime1">
               <a:rPr lang="en-GB" smtClean="0"/>
-              <a:t>26/01/2026</a:t>
+              <a:t>03/03/2026</a:t>
             </a:fld>
             <a:endParaRPr lang="en-GB"/>
           </a:p>
@@ -1784,7 +1790,7 @@
           <a:p>
             <a:fld id="{D2D5D4B4-C926-4B45-8815-1ED8911179A2}" type="datetime1">
               <a:rPr lang="en-GB" smtClean="0"/>
-              <a:t>26/01/2026</a:t>
+              <a:t>03/03/2026</a:t>
             </a:fld>
             <a:endParaRPr lang="en-GB"/>
           </a:p>
@@ -2052,7 +2058,7 @@
           <a:p>
             <a:fld id="{B4C5210A-0E37-4935-93AF-69F21A5F712F}" type="datetime1">
               <a:rPr lang="en-GB" smtClean="0"/>
-              <a:t>26/01/2026</a:t>
+              <a:t>03/03/2026</a:t>
             </a:fld>
             <a:endParaRPr lang="en-GB"/>
           </a:p>
@@ -2467,7 +2473,7 @@
           <a:p>
             <a:fld id="{3D3A6B2F-436C-4691-80E8-9C890E000E9D}" type="datetime1">
               <a:rPr lang="en-GB" smtClean="0"/>
-              <a:t>26/01/2026</a:t>
+              <a:t>03/03/2026</a:t>
             </a:fld>
             <a:endParaRPr lang="en-GB"/>
           </a:p>
@@ -2609,7 +2615,7 @@
           <a:p>
             <a:fld id="{84385F4C-D74B-496F-8D21-97E3549C783B}" type="datetime1">
               <a:rPr lang="en-GB" smtClean="0"/>
-              <a:t>26/01/2026</a:t>
+              <a:t>03/03/2026</a:t>
             </a:fld>
             <a:endParaRPr lang="en-GB"/>
           </a:p>
@@ -2722,7 +2728,7 @@
           <a:p>
             <a:fld id="{0CBDCB32-C241-4703-A832-4EB47BD54E83}" type="datetime1">
               <a:rPr lang="en-GB" smtClean="0"/>
-              <a:t>26/01/2026</a:t>
+              <a:t>03/03/2026</a:t>
             </a:fld>
             <a:endParaRPr lang="en-GB"/>
           </a:p>
@@ -3035,7 +3041,7 @@
           <a:p>
             <a:fld id="{85C150FF-BE95-4D25-A16A-E368A81CBF24}" type="datetime1">
               <a:rPr lang="en-GB" smtClean="0"/>
-              <a:t>26/01/2026</a:t>
+              <a:t>03/03/2026</a:t>
             </a:fld>
             <a:endParaRPr lang="en-GB"/>
           </a:p>
@@ -3324,7 +3330,7 @@
           <a:p>
             <a:fld id="{F3C5DB4B-B349-43C9-A424-BADA723AD9F1}" type="datetime1">
               <a:rPr lang="en-GB" smtClean="0"/>
-              <a:t>26/01/2026</a:t>
+              <a:t>03/03/2026</a:t>
             </a:fld>
             <a:endParaRPr lang="en-GB"/>
           </a:p>
@@ -3567,7 +3573,7 @@
           <a:p>
             <a:fld id="{12632426-0A0C-405F-A3D0-2D11AA44702A}" type="datetime1">
               <a:rPr lang="en-GB" smtClean="0"/>
-              <a:t>26/01/2026</a:t>
+              <a:t>03/03/2026</a:t>
             </a:fld>
             <a:endParaRPr lang="en-GB"/>
           </a:p>
@@ -4008,12 +4014,9 @@
           <a:p>
             <a:r>
               <a:rPr lang="de-DE" dirty="0" err="1"/>
-              <a:t>Embodied</a:t>
-            </a:r>
-            <a:r>
-              <a:rPr lang="de-DE" dirty="0"/>
-              <a:t> RL</a:t>
-            </a:r>
+              <a:t>Applications</a:t>
+            </a:r>
+            <a:endParaRPr lang="de-DE" dirty="0"/>
           </a:p>
         </p:txBody>
       </p:sp>
@@ -4077,10 +4080,10 @@
       </p:grpSpPr>
       <p:sp>
         <p:nvSpPr>
-          <p:cNvPr id="4" name="Title 3">
-            <a:extLst>
-              <a:ext uri="{FF2B5EF4-FFF2-40B4-BE49-F238E27FC236}">
-                <a16:creationId xmlns:a16="http://schemas.microsoft.com/office/drawing/2014/main" id="{080AD447-446B-E09E-6F4A-522C1DBB462E}"/>
+          <p:cNvPr id="2" name="Titel 1">
+            <a:extLst>
+              <a:ext uri="{FF2B5EF4-FFF2-40B4-BE49-F238E27FC236}">
+                <a16:creationId xmlns:a16="http://schemas.microsoft.com/office/drawing/2014/main" id="{C923AE16-A649-72E3-55D8-0F397230739E}"/>
               </a:ext>
             </a:extLst>
           </p:cNvPr>
@@ -4096,218 +4099,48 @@
           <a:bodyPr/>
           <a:lstStyle/>
           <a:p>
-            <a:r>
-              <a:rPr lang="en-GB" dirty="0"/>
-              <a:t>Course Schedule</a:t>
-            </a:r>
-          </a:p>
-        </p:txBody>
-      </p:sp>
-      <p:sp>
-        <p:nvSpPr>
-          <p:cNvPr id="6" name="Inhaltsplatzhalter 5">
-            <a:extLst>
-              <a:ext uri="{FF2B5EF4-FFF2-40B4-BE49-F238E27FC236}">
-                <a16:creationId xmlns:a16="http://schemas.microsoft.com/office/drawing/2014/main" id="{CF502483-E45D-7D7D-D169-ACA4F8327D26}"/>
-              </a:ext>
-            </a:extLst>
-          </p:cNvPr>
-          <p:cNvSpPr>
-            <a:spLocks noGrp="1"/>
-          </p:cNvSpPr>
-          <p:nvPr>
-            <p:ph sz="half" idx="1"/>
-          </p:nvPr>
-        </p:nvSpPr>
-        <p:spPr/>
-        <p:txBody>
-          <a:bodyPr>
-            <a:normAutofit/>
-          </a:bodyPr>
-          <a:lstStyle/>
-          <a:p>
-            <a:pPr marL="514350" indent="-514350">
-              <a:buFont typeface="+mj-lt"/>
-              <a:buAutoNum type="arabicPeriod"/>
-            </a:pPr>
+            <a:endParaRPr lang="de-DE" dirty="0"/>
+          </a:p>
+        </p:txBody>
+      </p:sp>
+      <p:sp>
+        <p:nvSpPr>
+          <p:cNvPr id="3" name="Inhaltsplatzhalter 2">
+            <a:extLst>
+              <a:ext uri="{FF2B5EF4-FFF2-40B4-BE49-F238E27FC236}">
+                <a16:creationId xmlns:a16="http://schemas.microsoft.com/office/drawing/2014/main" id="{EB966C69-4B86-83DE-3C84-A9D6C74D19C8}"/>
+              </a:ext>
+            </a:extLst>
+          </p:cNvPr>
+          <p:cNvSpPr>
+            <a:spLocks noGrp="1"/>
+          </p:cNvSpPr>
+          <p:nvPr>
+            <p:ph idx="1"/>
+          </p:nvPr>
+        </p:nvSpPr>
+        <p:spPr/>
+        <p:txBody>
+          <a:bodyPr/>
+          <a:lstStyle/>
+          <a:p>
+            <a:r>
+              <a:rPr lang="de-DE" dirty="0" err="1"/>
+              <a:t>RL_electric</a:t>
+            </a:r>
             <a:r>
               <a:rPr lang="de-DE" dirty="0"/>
-              <a:t>Foundations</a:t>
-            </a:r>
-          </a:p>
-          <a:p>
-            <a:pPr marL="514350" indent="-514350">
-              <a:buFont typeface="+mj-lt"/>
-              <a:buAutoNum type="arabicPeriod"/>
-            </a:pPr>
-            <a:endParaRPr lang="de-DE" dirty="0"/>
-          </a:p>
-          <a:p>
-            <a:pPr marL="514350" indent="-514350">
-              <a:buFont typeface="+mj-lt"/>
-              <a:buAutoNum type="arabicPeriod"/>
-            </a:pPr>
-            <a:r>
-              <a:rPr lang="de-DE" dirty="0" err="1"/>
-              <a:t>Tabular</a:t>
-            </a:r>
-            <a:r>
-              <a:rPr lang="de-DE" dirty="0"/>
-              <a:t> Methods</a:t>
-            </a:r>
-          </a:p>
-          <a:p>
-            <a:pPr marL="514350" indent="-514350">
-              <a:buFont typeface="+mj-lt"/>
-              <a:buAutoNum type="arabicPeriod"/>
-            </a:pPr>
-            <a:endParaRPr lang="de-DE" dirty="0"/>
-          </a:p>
-          <a:p>
-            <a:pPr marL="514350" indent="-514350">
-              <a:buFont typeface="+mj-lt"/>
-              <a:buAutoNum type="arabicPeriod"/>
-            </a:pPr>
-            <a:r>
-              <a:rPr lang="de-DE" dirty="0" err="1"/>
-              <a:t>Function</a:t>
-            </a:r>
-            <a:r>
-              <a:rPr lang="de-DE" dirty="0"/>
-              <a:t> Approximation</a:t>
-            </a:r>
-          </a:p>
-          <a:p>
-            <a:pPr marL="514350" indent="-514350">
-              <a:buFont typeface="+mj-lt"/>
-              <a:buAutoNum type="arabicPeriod"/>
-            </a:pPr>
-            <a:endParaRPr lang="de-DE" dirty="0"/>
-          </a:p>
-          <a:p>
-            <a:pPr marL="514350" indent="-514350">
-              <a:buFont typeface="+mj-lt"/>
-              <a:buAutoNum type="arabicPeriod"/>
-            </a:pPr>
-            <a:r>
-              <a:rPr lang="de-DE" dirty="0"/>
-              <a:t>Deep Q-Learning</a:t>
-            </a:r>
-          </a:p>
-        </p:txBody>
-      </p:sp>
-      <p:sp>
-        <p:nvSpPr>
-          <p:cNvPr id="7" name="Inhaltsplatzhalter 6">
-            <a:extLst>
-              <a:ext uri="{FF2B5EF4-FFF2-40B4-BE49-F238E27FC236}">
-                <a16:creationId xmlns:a16="http://schemas.microsoft.com/office/drawing/2014/main" id="{B671907E-FFFA-73EF-8E7D-4AB4EBDD957B}"/>
-              </a:ext>
-            </a:extLst>
-          </p:cNvPr>
-          <p:cNvSpPr>
-            <a:spLocks noGrp="1"/>
-          </p:cNvSpPr>
-          <p:nvPr>
-            <p:ph sz="half" idx="2"/>
-          </p:nvPr>
-        </p:nvSpPr>
-        <p:spPr>
-          <a:xfrm>
-            <a:off x="6172199" y="1825625"/>
-            <a:ext cx="5268191" cy="4351338"/>
-          </a:xfrm>
-        </p:spPr>
-        <p:txBody>
-          <a:bodyPr>
-            <a:normAutofit/>
-          </a:bodyPr>
-          <a:lstStyle/>
-          <a:p>
-            <a:pPr marL="514350" indent="-514350">
-              <a:buFont typeface="+mj-lt"/>
-              <a:buAutoNum type="arabicPeriod" startAt="5"/>
-            </a:pPr>
-            <a:r>
-              <a:rPr lang="de-DE" dirty="0"/>
-              <a:t>Policy Gradient Methods</a:t>
-            </a:r>
-          </a:p>
-          <a:p>
-            <a:pPr marL="514350" indent="-514350">
-              <a:buFont typeface="+mj-lt"/>
-              <a:buAutoNum type="arabicPeriod" startAt="5"/>
-            </a:pPr>
-            <a:endParaRPr lang="de-DE" dirty="0"/>
-          </a:p>
-          <a:p>
-            <a:pPr marL="514350" indent="-514350">
-              <a:buFont typeface="+mj-lt"/>
-              <a:buAutoNum type="arabicPeriod" startAt="5"/>
-            </a:pPr>
-            <a:r>
-              <a:rPr lang="de-DE" dirty="0"/>
-              <a:t>Actor-</a:t>
-            </a:r>
-            <a:r>
-              <a:rPr lang="de-DE" dirty="0" err="1"/>
-              <a:t>Critic</a:t>
-            </a:r>
-            <a:r>
-              <a:rPr lang="de-DE" dirty="0"/>
-              <a:t> Methods</a:t>
-            </a:r>
-          </a:p>
-          <a:p>
-            <a:pPr marL="514350" indent="-514350">
-              <a:buFont typeface="+mj-lt"/>
-              <a:buAutoNum type="arabicPeriod" startAt="5"/>
-            </a:pPr>
-            <a:endParaRPr lang="de-DE" dirty="0"/>
-          </a:p>
-          <a:p>
-            <a:pPr marL="514350" indent="-514350">
-              <a:buFont typeface="+mj-lt"/>
-              <a:buAutoNum type="arabicPeriod" startAt="5"/>
-            </a:pPr>
-            <a:r>
-              <a:rPr lang="de-DE" dirty="0" err="1"/>
-              <a:t>Beyond</a:t>
-            </a:r>
-            <a:r>
-              <a:rPr lang="de-DE" dirty="0"/>
-              <a:t> Online Model-Free RL</a:t>
-            </a:r>
-          </a:p>
-          <a:p>
-            <a:pPr marL="514350" indent="-514350">
-              <a:buFont typeface="+mj-lt"/>
-              <a:buAutoNum type="arabicPeriod" startAt="5"/>
-            </a:pPr>
-            <a:endParaRPr lang="de-DE" dirty="0"/>
-          </a:p>
-          <a:p>
-            <a:pPr marL="514350" indent="-514350">
-              <a:buFont typeface="+mj-lt"/>
-              <a:buAutoNum type="arabicPeriod" startAt="5"/>
-            </a:pPr>
-            <a:r>
-              <a:rPr lang="de-DE" dirty="0" err="1"/>
-              <a:t>Embodied</a:t>
-            </a:r>
-            <a:r>
-              <a:rPr lang="de-DE" dirty="0"/>
-              <a:t> RL</a:t>
-            </a:r>
-          </a:p>
-        </p:txBody>
-      </p:sp>
-      <p:sp>
-        <p:nvSpPr>
-          <p:cNvPr id="3" name="Slide Number Placeholder 2">
-            <a:extLst>
-              <a:ext uri="{FF2B5EF4-FFF2-40B4-BE49-F238E27FC236}">
-                <a16:creationId xmlns:a16="http://schemas.microsoft.com/office/drawing/2014/main" id="{A0664D44-83AC-6A7A-17E0-C1AE2ED18FF5}"/>
+              <a:t> …</a:t>
+            </a:r>
+          </a:p>
+        </p:txBody>
+      </p:sp>
+      <p:sp>
+        <p:nvSpPr>
+          <p:cNvPr id="4" name="Foliennummernplatzhalter 3">
+            <a:extLst>
+              <a:ext uri="{FF2B5EF4-FFF2-40B4-BE49-F238E27FC236}">
+                <a16:creationId xmlns:a16="http://schemas.microsoft.com/office/drawing/2014/main" id="{C93A7205-C7DE-1E17-A534-2C7A05758D2B}"/>
               </a:ext>
             </a:extLst>
           </p:cNvPr>
@@ -4327,14 +4160,14 @@
               <a:rPr lang="en-GB" smtClean="0"/>
               <a:t>2</a:t>
             </a:fld>
-            <a:endParaRPr lang="en-GB" dirty="0"/>
+            <a:endParaRPr lang="en-GB"/>
           </a:p>
         </p:txBody>
       </p:sp>
     </p:spTree>
     <p:extLst>
       <p:ext uri="{BB962C8B-B14F-4D97-AF65-F5344CB8AC3E}">
-        <p14:creationId xmlns:p14="http://schemas.microsoft.com/office/powerpoint/2010/main" val="1376558971"/>
+        <p14:creationId xmlns:p14="http://schemas.microsoft.com/office/powerpoint/2010/main" val="1959560525"/>
       </p:ext>
     </p:extLst>
   </p:cSld>
@@ -4366,7 +4199,7 @@
           <p:cNvPr id="2" name="Titel 1">
             <a:extLst>
               <a:ext uri="{FF2B5EF4-FFF2-40B4-BE49-F238E27FC236}">
-                <a16:creationId xmlns:a16="http://schemas.microsoft.com/office/drawing/2014/main" id="{6B454CE0-BAFB-F9B0-668F-121821B8B29C}"/>
+                <a16:creationId xmlns:a16="http://schemas.microsoft.com/office/drawing/2014/main" id="{4D1BC312-5ED6-C98A-526D-4E44EB87852B}"/>
               </a:ext>
             </a:extLst>
           </p:cNvPr>
@@ -4383,8 +4216,12 @@
           <a:lstStyle/>
           <a:p>
             <a:r>
+              <a:rPr lang="de-DE" dirty="0"/>
+              <a:t>Simulation-</a:t>
+            </a:r>
+            <a:r>
               <a:rPr lang="de-DE" dirty="0" err="1"/>
-              <a:t>Embodied</a:t>
+              <a:t>Based</a:t>
             </a:r>
             <a:r>
               <a:rPr lang="de-DE" dirty="0"/>
@@ -4398,7 +4235,7 @@
           <p:cNvPr id="3" name="Inhaltsplatzhalter 2">
             <a:extLst>
               <a:ext uri="{FF2B5EF4-FFF2-40B4-BE49-F238E27FC236}">
-                <a16:creationId xmlns:a16="http://schemas.microsoft.com/office/drawing/2014/main" id="{7494ABEC-DFA9-E877-8C19-A56BC6A1AA01}"/>
+                <a16:creationId xmlns:a16="http://schemas.microsoft.com/office/drawing/2014/main" id="{AD5CD4D5-6F9F-8DFE-CDAA-3EC4FDBBF86D}"/>
               </a:ext>
             </a:extLst>
           </p:cNvPr>
@@ -4414,164 +4251,7 @@
           <a:bodyPr/>
           <a:lstStyle/>
           <a:p>
-            <a:r>
-              <a:rPr lang="de-DE" dirty="0"/>
-              <a:t>Simulation-</a:t>
-            </a:r>
-            <a:r>
-              <a:rPr lang="de-DE" dirty="0" err="1"/>
-              <a:t>based</a:t>
-            </a:r>
-            <a:r>
-              <a:rPr lang="de-DE" dirty="0"/>
-              <a:t> RL</a:t>
-            </a:r>
-          </a:p>
-          <a:p>
-            <a:r>
-              <a:rPr lang="de-DE" dirty="0"/>
-              <a:t>Simulation → real </a:t>
-            </a:r>
-            <a:r>
-              <a:rPr lang="de-DE" dirty="0" err="1"/>
-              <a:t>transfer</a:t>
-            </a:r>
-            <a:r>
-              <a:rPr lang="de-DE" dirty="0"/>
-              <a:t> (</a:t>
-            </a:r>
-            <a:r>
-              <a:rPr lang="de-DE" dirty="0" err="1"/>
-              <a:t>sim</a:t>
-            </a:r>
-            <a:r>
-              <a:rPr lang="de-DE" dirty="0"/>
-              <a:t>-</a:t>
-            </a:r>
-            <a:r>
-              <a:rPr lang="de-DE" dirty="0" err="1"/>
-              <a:t>to</a:t>
-            </a:r>
-            <a:r>
-              <a:rPr lang="de-DE" dirty="0"/>
-              <a:t>-real </a:t>
-            </a:r>
-            <a:r>
-              <a:rPr lang="de-DE" dirty="0" err="1"/>
-              <a:t>gap</a:t>
-            </a:r>
-            <a:r>
-              <a:rPr lang="de-DE" dirty="0"/>
-              <a:t>)</a:t>
-            </a:r>
-          </a:p>
-          <a:p>
-            <a:r>
-              <a:rPr lang="de-DE" dirty="0"/>
-              <a:t>Imitation </a:t>
-            </a:r>
-            <a:r>
-              <a:rPr lang="de-DE" dirty="0" err="1"/>
-              <a:t>learning</a:t>
-            </a:r>
-            <a:r>
-              <a:rPr lang="de-DE" dirty="0"/>
-              <a:t> </a:t>
-            </a:r>
-            <a:r>
-              <a:rPr lang="de-DE" dirty="0" err="1"/>
-              <a:t>for</a:t>
-            </a:r>
-            <a:r>
-              <a:rPr lang="de-DE" dirty="0"/>
-              <a:t> </a:t>
-            </a:r>
-            <a:r>
-              <a:rPr lang="de-DE" dirty="0" err="1"/>
-              <a:t>robotics</a:t>
-            </a:r>
-            <a:endParaRPr lang="de-DE" dirty="0"/>
-          </a:p>
-          <a:p>
-            <a:r>
-              <a:rPr lang="de-DE" dirty="0"/>
-              <a:t>Real-</a:t>
-            </a:r>
-            <a:r>
-              <a:rPr lang="de-DE" dirty="0" err="1"/>
-              <a:t>world</a:t>
-            </a:r>
-            <a:r>
-              <a:rPr lang="de-DE" dirty="0"/>
-              <a:t> RL </a:t>
-            </a:r>
-            <a:r>
-              <a:rPr lang="de-DE" dirty="0" err="1"/>
-              <a:t>constraints</a:t>
-            </a:r>
-            <a:r>
-              <a:rPr lang="de-DE" dirty="0"/>
-              <a:t>: </a:t>
-            </a:r>
-            <a:r>
-              <a:rPr lang="de-DE" dirty="0" err="1"/>
-              <a:t>safety</a:t>
-            </a:r>
-            <a:r>
-              <a:rPr lang="de-DE" dirty="0"/>
-              <a:t>, sample </a:t>
-            </a:r>
-            <a:r>
-              <a:rPr lang="de-DE" dirty="0" err="1"/>
-              <a:t>efficiency</a:t>
-            </a:r>
-            <a:r>
-              <a:rPr lang="de-DE" dirty="0"/>
-              <a:t>, online </a:t>
-            </a:r>
-            <a:r>
-              <a:rPr lang="de-DE" dirty="0" err="1"/>
-              <a:t>data</a:t>
-            </a:r>
-            <a:r>
-              <a:rPr lang="de-DE" dirty="0"/>
-              <a:t> </a:t>
-            </a:r>
-            <a:r>
-              <a:rPr lang="de-DE" dirty="0" err="1"/>
-              <a:t>collection</a:t>
-            </a:r>
-            <a:endParaRPr lang="de-DE" dirty="0"/>
-          </a:p>
-          <a:p>
-            <a:r>
-              <a:rPr lang="de-DE" dirty="0"/>
-              <a:t>Generalist </a:t>
-            </a:r>
-            <a:r>
-              <a:rPr lang="de-DE" dirty="0" err="1"/>
-              <a:t>robot</a:t>
-            </a:r>
-            <a:r>
-              <a:rPr lang="de-DE" dirty="0"/>
-              <a:t> </a:t>
-            </a:r>
-            <a:r>
-              <a:rPr lang="de-DE" dirty="0" err="1"/>
-              <a:t>policies</a:t>
-            </a:r>
-            <a:r>
-              <a:rPr lang="de-DE" dirty="0"/>
-              <a:t> (e.g., </a:t>
-            </a:r>
-            <a:r>
-              <a:rPr lang="de-DE" dirty="0" err="1"/>
-              <a:t>SmolVLA</a:t>
-            </a:r>
-            <a:r>
-              <a:rPr lang="de-DE" dirty="0"/>
-              <a:t>)</a:t>
-            </a:r>
+            <a:endParaRPr lang="de-DE"/>
           </a:p>
         </p:txBody>
       </p:sp>
@@ -4580,7 +4260,7 @@
           <p:cNvPr id="4" name="Foliennummernplatzhalter 3">
             <a:extLst>
               <a:ext uri="{FF2B5EF4-FFF2-40B4-BE49-F238E27FC236}">
-                <a16:creationId xmlns:a16="http://schemas.microsoft.com/office/drawing/2014/main" id="{C2BA8F83-5EF2-341E-9942-5EE099C574E6}"/>
+                <a16:creationId xmlns:a16="http://schemas.microsoft.com/office/drawing/2014/main" id="{C26B899B-9445-0D48-7AF1-73DC356B0763}"/>
               </a:ext>
             </a:extLst>
           </p:cNvPr>
@@ -4607,7 +4287,851 @@
     </p:spTree>
     <p:extLst>
       <p:ext uri="{BB962C8B-B14F-4D97-AF65-F5344CB8AC3E}">
+        <p14:creationId xmlns:p14="http://schemas.microsoft.com/office/powerpoint/2010/main" val="2844972681"/>
+      </p:ext>
+    </p:extLst>
+  </p:cSld>
+  <p:clrMapOvr>
+    <a:masterClrMapping/>
+  </p:clrMapOvr>
+</p:sld>
+</file>
+
+<file path=ppt/slides/slide4.xml><?xml version="1.0" encoding="utf-8"?>
+<p:sld xmlns:a="http://schemas.openxmlformats.org/drawingml/2006/main" xmlns:r="http://schemas.openxmlformats.org/officeDocument/2006/relationships" xmlns:p="http://schemas.openxmlformats.org/presentationml/2006/main">
+  <p:cSld>
+    <p:spTree>
+      <p:nvGrpSpPr>
+        <p:cNvPr id="1" name=""/>
+        <p:cNvGrpSpPr/>
+        <p:nvPr/>
+      </p:nvGrpSpPr>
+      <p:grpSpPr>
+        <a:xfrm>
+          <a:off x="0" y="0"/>
+          <a:ext cx="0" cy="0"/>
+          <a:chOff x="0" y="0"/>
+          <a:chExt cx="0" cy="0"/>
+        </a:xfrm>
+      </p:grpSpPr>
+      <p:sp>
+        <p:nvSpPr>
+          <p:cNvPr id="2" name="Titel 1">
+            <a:extLst>
+              <a:ext uri="{FF2B5EF4-FFF2-40B4-BE49-F238E27FC236}">
+                <a16:creationId xmlns:a16="http://schemas.microsoft.com/office/drawing/2014/main" id="{1B9F55BA-03FA-72FC-85DD-5352EB3FADFD}"/>
+              </a:ext>
+            </a:extLst>
+          </p:cNvPr>
+          <p:cNvSpPr>
+            <a:spLocks noGrp="1"/>
+          </p:cNvSpPr>
+          <p:nvPr>
+            <p:ph type="title"/>
+          </p:nvPr>
+        </p:nvSpPr>
+        <p:spPr/>
+        <p:txBody>
+          <a:bodyPr/>
+          <a:lstStyle/>
+          <a:p>
+            <a:endParaRPr lang="de-DE"/>
+          </a:p>
+        </p:txBody>
+      </p:sp>
+      <p:sp>
+        <p:nvSpPr>
+          <p:cNvPr id="3" name="Inhaltsplatzhalter 2">
+            <a:extLst>
+              <a:ext uri="{FF2B5EF4-FFF2-40B4-BE49-F238E27FC236}">
+                <a16:creationId xmlns:a16="http://schemas.microsoft.com/office/drawing/2014/main" id="{41D369ED-0F63-EFF4-D4E0-6ACFBDDA97C2}"/>
+              </a:ext>
+            </a:extLst>
+          </p:cNvPr>
+          <p:cNvSpPr>
+            <a:spLocks noGrp="1"/>
+          </p:cNvSpPr>
+          <p:nvPr>
+            <p:ph idx="1"/>
+          </p:nvPr>
+        </p:nvSpPr>
+        <p:spPr/>
+        <p:txBody>
+          <a:bodyPr/>
+          <a:lstStyle/>
+          <a:p>
+            <a:r>
+              <a:rPr lang="de-DE" dirty="0"/>
+              <a:t>…</a:t>
+            </a:r>
+          </a:p>
+        </p:txBody>
+      </p:sp>
+      <p:sp>
+        <p:nvSpPr>
+          <p:cNvPr id="4" name="Foliennummernplatzhalter 3">
+            <a:extLst>
+              <a:ext uri="{FF2B5EF4-FFF2-40B4-BE49-F238E27FC236}">
+                <a16:creationId xmlns:a16="http://schemas.microsoft.com/office/drawing/2014/main" id="{633D7CE9-4449-75F3-14B9-0B2EEC9EDE0F}"/>
+              </a:ext>
+            </a:extLst>
+          </p:cNvPr>
+          <p:cNvSpPr>
+            <a:spLocks noGrp="1"/>
+          </p:cNvSpPr>
+          <p:nvPr>
+            <p:ph type="sldNum" sz="quarter" idx="12"/>
+          </p:nvPr>
+        </p:nvSpPr>
+        <p:spPr/>
+        <p:txBody>
+          <a:bodyPr/>
+          <a:lstStyle/>
+          <a:p>
+            <a:fld id="{08C366F5-AFAD-49CB-854A-9D9E238FCA13}" type="slidenum">
+              <a:rPr lang="en-GB" smtClean="0"/>
+              <a:t>4</a:t>
+            </a:fld>
+            <a:endParaRPr lang="en-GB"/>
+          </a:p>
+        </p:txBody>
+      </p:sp>
+      <p:pic>
+        <p:nvPicPr>
+          <p:cNvPr id="5" name="Picture 3" descr="A close up of text on a black background&#10;&#10;Description automatically generated">
+            <a:extLst>
+              <a:ext uri="{FF2B5EF4-FFF2-40B4-BE49-F238E27FC236}">
+                <a16:creationId xmlns:a16="http://schemas.microsoft.com/office/drawing/2014/main" id="{A1BAC26E-325A-59C6-F383-D86A7B5A7D80}"/>
+              </a:ext>
+            </a:extLst>
+          </p:cNvPr>
+          <p:cNvPicPr>
+            <a:picLocks noChangeAspect="1"/>
+          </p:cNvPicPr>
+          <p:nvPr/>
+        </p:nvPicPr>
+        <p:blipFill>
+          <a:blip r:embed="rId2"/>
+          <a:stretch>
+            <a:fillRect/>
+          </a:stretch>
+        </p:blipFill>
+        <p:spPr>
+          <a:xfrm>
+            <a:off x="5963778" y="2540809"/>
+            <a:ext cx="3488728" cy="2708199"/>
+          </a:xfrm>
+          <a:prstGeom prst="rect">
+            <a:avLst/>
+          </a:prstGeom>
+        </p:spPr>
+      </p:pic>
+      <p:sp>
+        <p:nvSpPr>
+          <p:cNvPr id="6" name="TextBox 5">
+            <a:extLst>
+              <a:ext uri="{FF2B5EF4-FFF2-40B4-BE49-F238E27FC236}">
+                <a16:creationId xmlns:a16="http://schemas.microsoft.com/office/drawing/2014/main" id="{768A0678-9739-80A4-741C-0BB05A3CE9E6}"/>
+              </a:ext>
+            </a:extLst>
+          </p:cNvPr>
+          <p:cNvSpPr txBox="1"/>
+          <p:nvPr/>
+        </p:nvSpPr>
+        <p:spPr>
+          <a:xfrm>
+            <a:off x="6147712" y="5200065"/>
+            <a:ext cx="814647" cy="246221"/>
+          </a:xfrm>
+          <a:prstGeom prst="rect">
+            <a:avLst/>
+          </a:prstGeom>
+          <a:noFill/>
+        </p:spPr>
+        <p:txBody>
+          <a:bodyPr wrap="none" rtlCol="0">
+            <a:spAutoFit/>
+          </a:bodyPr>
+          <a:lstStyle/>
+          <a:p>
+            <a:r>
+              <a:rPr lang="de-DE" sz="1000" dirty="0" err="1"/>
+              <a:t>from</a:t>
+            </a:r>
+            <a:r>
+              <a:rPr lang="de-DE" sz="1000" dirty="0"/>
+              <a:t> Sutton</a:t>
+            </a:r>
+          </a:p>
+        </p:txBody>
+      </p:sp>
+      <p:pic>
+        <p:nvPicPr>
+          <p:cNvPr id="7" name="Picture 8" descr="A picture containing rectangle&#10;&#10;Description automatically generated">
+            <a:extLst>
+              <a:ext uri="{FF2B5EF4-FFF2-40B4-BE49-F238E27FC236}">
+                <a16:creationId xmlns:a16="http://schemas.microsoft.com/office/drawing/2014/main" id="{51930671-4F0C-E7C8-B224-A9B0DA0F69DA}"/>
+              </a:ext>
+            </a:extLst>
+          </p:cNvPr>
+          <p:cNvPicPr>
+            <a:picLocks noChangeAspect="1"/>
+          </p:cNvPicPr>
+          <p:nvPr/>
+        </p:nvPicPr>
+        <p:blipFill>
+          <a:blip r:embed="rId3"/>
+          <a:stretch>
+            <a:fillRect/>
+          </a:stretch>
+        </p:blipFill>
+        <p:spPr>
+          <a:xfrm>
+            <a:off x="1958985" y="4801098"/>
+            <a:ext cx="4004792" cy="522077"/>
+          </a:xfrm>
+          <a:prstGeom prst="rect">
+            <a:avLst/>
+          </a:prstGeom>
+        </p:spPr>
+      </p:pic>
+    </p:spTree>
+    <p:extLst>
+      <p:ext uri="{BB962C8B-B14F-4D97-AF65-F5344CB8AC3E}">
+        <p14:creationId xmlns:p14="http://schemas.microsoft.com/office/powerpoint/2010/main" val="2938255594"/>
+      </p:ext>
+    </p:extLst>
+  </p:cSld>
+  <p:clrMapOvr>
+    <a:masterClrMapping/>
+  </p:clrMapOvr>
+</p:sld>
+</file>
+
+<file path=ppt/slides/slide5.xml><?xml version="1.0" encoding="utf-8"?>
+<p:sld xmlns:a="http://schemas.openxmlformats.org/drawingml/2006/main" xmlns:r="http://schemas.openxmlformats.org/officeDocument/2006/relationships" xmlns:p="http://schemas.openxmlformats.org/presentationml/2006/main">
+  <p:cSld>
+    <p:spTree>
+      <p:nvGrpSpPr>
+        <p:cNvPr id="1" name=""/>
+        <p:cNvGrpSpPr/>
+        <p:nvPr/>
+      </p:nvGrpSpPr>
+      <p:grpSpPr>
+        <a:xfrm>
+          <a:off x="0" y="0"/>
+          <a:ext cx="0" cy="0"/>
+          <a:chOff x="0" y="0"/>
+          <a:chExt cx="0" cy="0"/>
+        </a:xfrm>
+      </p:grpSpPr>
+      <p:sp>
+        <p:nvSpPr>
+          <p:cNvPr id="2" name="Titel 1">
+            <a:extLst>
+              <a:ext uri="{FF2B5EF4-FFF2-40B4-BE49-F238E27FC236}">
+                <a16:creationId xmlns:a16="http://schemas.microsoft.com/office/drawing/2014/main" id="{5EF8C172-CA3F-BB98-40FF-E6E8DB31CEB7}"/>
+              </a:ext>
+            </a:extLst>
+          </p:cNvPr>
+          <p:cNvSpPr>
+            <a:spLocks noGrp="1"/>
+          </p:cNvSpPr>
+          <p:nvPr>
+            <p:ph type="title"/>
+          </p:nvPr>
+        </p:nvSpPr>
+        <p:spPr/>
+        <p:txBody>
+          <a:bodyPr/>
+          <a:lstStyle/>
+          <a:p>
+            <a:r>
+              <a:rPr lang="de-DE" dirty="0"/>
+              <a:t>Sim-</a:t>
+            </a:r>
+            <a:r>
+              <a:rPr lang="de-DE" dirty="0" err="1"/>
+              <a:t>to</a:t>
+            </a:r>
+            <a:r>
+              <a:rPr lang="de-DE" dirty="0"/>
+              <a:t>-Real Gap</a:t>
+            </a:r>
+          </a:p>
+        </p:txBody>
+      </p:sp>
+      <p:sp>
+        <p:nvSpPr>
+          <p:cNvPr id="3" name="Inhaltsplatzhalter 2">
+            <a:extLst>
+              <a:ext uri="{FF2B5EF4-FFF2-40B4-BE49-F238E27FC236}">
+                <a16:creationId xmlns:a16="http://schemas.microsoft.com/office/drawing/2014/main" id="{076D2FFF-31B4-8EAA-558A-24BF5036BC92}"/>
+              </a:ext>
+            </a:extLst>
+          </p:cNvPr>
+          <p:cNvSpPr>
+            <a:spLocks noGrp="1"/>
+          </p:cNvSpPr>
+          <p:nvPr>
+            <p:ph idx="1"/>
+          </p:nvPr>
+        </p:nvSpPr>
+        <p:spPr/>
+        <p:txBody>
+          <a:bodyPr/>
+          <a:lstStyle/>
+          <a:p>
+            <a:r>
+              <a:rPr lang="de-DE" dirty="0" err="1"/>
+              <a:t>simulation</a:t>
+            </a:r>
+            <a:r>
+              <a:rPr lang="de-DE" dirty="0"/>
+              <a:t> → real </a:t>
+            </a:r>
+            <a:r>
+              <a:rPr lang="de-DE" dirty="0" err="1"/>
+              <a:t>transfer</a:t>
+            </a:r>
+            <a:endParaRPr lang="de-DE" dirty="0"/>
+          </a:p>
+        </p:txBody>
+      </p:sp>
+      <p:sp>
+        <p:nvSpPr>
+          <p:cNvPr id="4" name="Foliennummernplatzhalter 3">
+            <a:extLst>
+              <a:ext uri="{FF2B5EF4-FFF2-40B4-BE49-F238E27FC236}">
+                <a16:creationId xmlns:a16="http://schemas.microsoft.com/office/drawing/2014/main" id="{7CF9B4A1-C1A4-2D54-751B-082D1801E28C}"/>
+              </a:ext>
+            </a:extLst>
+          </p:cNvPr>
+          <p:cNvSpPr>
+            <a:spLocks noGrp="1"/>
+          </p:cNvSpPr>
+          <p:nvPr>
+            <p:ph type="sldNum" sz="quarter" idx="12"/>
+          </p:nvPr>
+        </p:nvSpPr>
+        <p:spPr/>
+        <p:txBody>
+          <a:bodyPr/>
+          <a:lstStyle/>
+          <a:p>
+            <a:fld id="{08C366F5-AFAD-49CB-854A-9D9E238FCA13}" type="slidenum">
+              <a:rPr lang="en-GB" smtClean="0"/>
+              <a:t>5</a:t>
+            </a:fld>
+            <a:endParaRPr lang="en-GB"/>
+          </a:p>
+        </p:txBody>
+      </p:sp>
+    </p:spTree>
+    <p:extLst>
+      <p:ext uri="{BB962C8B-B14F-4D97-AF65-F5344CB8AC3E}">
+        <p14:creationId xmlns:p14="http://schemas.microsoft.com/office/powerpoint/2010/main" val="2851711539"/>
+      </p:ext>
+    </p:extLst>
+  </p:cSld>
+  <p:clrMapOvr>
+    <a:masterClrMapping/>
+  </p:clrMapOvr>
+</p:sld>
+</file>
+
+<file path=ppt/slides/slide6.xml><?xml version="1.0" encoding="utf-8"?>
+<p:sld xmlns:a="http://schemas.openxmlformats.org/drawingml/2006/main" xmlns:r="http://schemas.openxmlformats.org/officeDocument/2006/relationships" xmlns:p="http://schemas.openxmlformats.org/presentationml/2006/main">
+  <p:cSld>
+    <p:spTree>
+      <p:nvGrpSpPr>
+        <p:cNvPr id="1" name=""/>
+        <p:cNvGrpSpPr/>
+        <p:nvPr/>
+      </p:nvGrpSpPr>
+      <p:grpSpPr>
+        <a:xfrm>
+          <a:off x="0" y="0"/>
+          <a:ext cx="0" cy="0"/>
+          <a:chOff x="0" y="0"/>
+          <a:chExt cx="0" cy="0"/>
+        </a:xfrm>
+      </p:grpSpPr>
+      <p:sp>
+        <p:nvSpPr>
+          <p:cNvPr id="2" name="Titel 1">
+            <a:extLst>
+              <a:ext uri="{FF2B5EF4-FFF2-40B4-BE49-F238E27FC236}">
+                <a16:creationId xmlns:a16="http://schemas.microsoft.com/office/drawing/2014/main" id="{783B9517-95B7-AB41-9175-0EA78F0CB06B}"/>
+              </a:ext>
+            </a:extLst>
+          </p:cNvPr>
+          <p:cNvSpPr>
+            <a:spLocks noGrp="1"/>
+          </p:cNvSpPr>
+          <p:nvPr>
+            <p:ph type="title"/>
+          </p:nvPr>
+        </p:nvSpPr>
+        <p:spPr/>
+        <p:txBody>
+          <a:bodyPr/>
+          <a:lstStyle/>
+          <a:p>
+            <a:r>
+              <a:rPr lang="de-DE" dirty="0"/>
+              <a:t>Real-World RL Constraints</a:t>
+            </a:r>
+          </a:p>
+        </p:txBody>
+      </p:sp>
+      <p:sp>
+        <p:nvSpPr>
+          <p:cNvPr id="3" name="Inhaltsplatzhalter 2">
+            <a:extLst>
+              <a:ext uri="{FF2B5EF4-FFF2-40B4-BE49-F238E27FC236}">
+                <a16:creationId xmlns:a16="http://schemas.microsoft.com/office/drawing/2014/main" id="{A39B71D9-3B4F-0EF8-E933-8EBE10DD7697}"/>
+              </a:ext>
+            </a:extLst>
+          </p:cNvPr>
+          <p:cNvSpPr>
+            <a:spLocks noGrp="1"/>
+          </p:cNvSpPr>
+          <p:nvPr>
+            <p:ph idx="1"/>
+          </p:nvPr>
+        </p:nvSpPr>
+        <p:spPr/>
+        <p:txBody>
+          <a:bodyPr/>
+          <a:lstStyle/>
+          <a:p>
+            <a:r>
+              <a:rPr lang="de-DE" dirty="0" err="1"/>
+              <a:t>safety</a:t>
+            </a:r>
+            <a:r>
+              <a:rPr lang="de-DE" dirty="0"/>
+              <a:t>, sample </a:t>
+            </a:r>
+            <a:r>
+              <a:rPr lang="de-DE" dirty="0" err="1"/>
+              <a:t>efficiency</a:t>
+            </a:r>
+            <a:r>
+              <a:rPr lang="de-DE" dirty="0"/>
+              <a:t>, online </a:t>
+            </a:r>
+            <a:r>
+              <a:rPr lang="de-DE" dirty="0" err="1"/>
+              <a:t>data</a:t>
+            </a:r>
+            <a:r>
+              <a:rPr lang="de-DE" dirty="0"/>
+              <a:t> </a:t>
+            </a:r>
+            <a:r>
+              <a:rPr lang="de-DE" dirty="0" err="1"/>
+              <a:t>collection</a:t>
+            </a:r>
+            <a:endParaRPr lang="de-DE" dirty="0"/>
+          </a:p>
+        </p:txBody>
+      </p:sp>
+      <p:sp>
+        <p:nvSpPr>
+          <p:cNvPr id="4" name="Foliennummernplatzhalter 3">
+            <a:extLst>
+              <a:ext uri="{FF2B5EF4-FFF2-40B4-BE49-F238E27FC236}">
+                <a16:creationId xmlns:a16="http://schemas.microsoft.com/office/drawing/2014/main" id="{84DB91F1-6D30-4CD3-27B8-FEE59B786790}"/>
+              </a:ext>
+            </a:extLst>
+          </p:cNvPr>
+          <p:cNvSpPr>
+            <a:spLocks noGrp="1"/>
+          </p:cNvSpPr>
+          <p:nvPr>
+            <p:ph type="sldNum" sz="quarter" idx="12"/>
+          </p:nvPr>
+        </p:nvSpPr>
+        <p:spPr/>
+        <p:txBody>
+          <a:bodyPr/>
+          <a:lstStyle/>
+          <a:p>
+            <a:fld id="{08C366F5-AFAD-49CB-854A-9D9E238FCA13}" type="slidenum">
+              <a:rPr lang="en-GB" smtClean="0"/>
+              <a:t>6</a:t>
+            </a:fld>
+            <a:endParaRPr lang="en-GB"/>
+          </a:p>
+        </p:txBody>
+      </p:sp>
+    </p:spTree>
+    <p:extLst>
+      <p:ext uri="{BB962C8B-B14F-4D97-AF65-F5344CB8AC3E}">
+        <p14:creationId xmlns:p14="http://schemas.microsoft.com/office/powerpoint/2010/main" val="1243724453"/>
+      </p:ext>
+    </p:extLst>
+  </p:cSld>
+  <p:clrMapOvr>
+    <a:masterClrMapping/>
+  </p:clrMapOvr>
+</p:sld>
+</file>
+
+<file path=ppt/slides/slide7.xml><?xml version="1.0" encoding="utf-8"?>
+<p:sld xmlns:a="http://schemas.openxmlformats.org/drawingml/2006/main" xmlns:r="http://schemas.openxmlformats.org/officeDocument/2006/relationships" xmlns:p="http://schemas.openxmlformats.org/presentationml/2006/main">
+  <p:cSld>
+    <p:spTree>
+      <p:nvGrpSpPr>
+        <p:cNvPr id="1" name=""/>
+        <p:cNvGrpSpPr/>
+        <p:nvPr/>
+      </p:nvGrpSpPr>
+      <p:grpSpPr>
+        <a:xfrm>
+          <a:off x="0" y="0"/>
+          <a:ext cx="0" cy="0"/>
+          <a:chOff x="0" y="0"/>
+          <a:chExt cx="0" cy="0"/>
+        </a:xfrm>
+      </p:grpSpPr>
+      <p:sp>
+        <p:nvSpPr>
+          <p:cNvPr id="2" name="Titel 1">
+            <a:extLst>
+              <a:ext uri="{FF2B5EF4-FFF2-40B4-BE49-F238E27FC236}">
+                <a16:creationId xmlns:a16="http://schemas.microsoft.com/office/drawing/2014/main" id="{6B454CE0-BAFB-F9B0-668F-121821B8B29C}"/>
+              </a:ext>
+            </a:extLst>
+          </p:cNvPr>
+          <p:cNvSpPr>
+            <a:spLocks noGrp="1"/>
+          </p:cNvSpPr>
+          <p:nvPr>
+            <p:ph type="title"/>
+          </p:nvPr>
+        </p:nvSpPr>
+        <p:spPr/>
+        <p:txBody>
+          <a:bodyPr/>
+          <a:lstStyle/>
+          <a:p>
+            <a:r>
+              <a:rPr lang="de-DE" dirty="0" err="1"/>
+              <a:t>Embodied</a:t>
+            </a:r>
+            <a:r>
+              <a:rPr lang="de-DE" dirty="0"/>
+              <a:t> RL</a:t>
+            </a:r>
+          </a:p>
+        </p:txBody>
+      </p:sp>
+      <p:sp>
+        <p:nvSpPr>
+          <p:cNvPr id="3" name="Inhaltsplatzhalter 2">
+            <a:extLst>
+              <a:ext uri="{FF2B5EF4-FFF2-40B4-BE49-F238E27FC236}">
+                <a16:creationId xmlns:a16="http://schemas.microsoft.com/office/drawing/2014/main" id="{7494ABEC-DFA9-E877-8C19-A56BC6A1AA01}"/>
+              </a:ext>
+            </a:extLst>
+          </p:cNvPr>
+          <p:cNvSpPr>
+            <a:spLocks noGrp="1"/>
+          </p:cNvSpPr>
+          <p:nvPr>
+            <p:ph idx="1"/>
+          </p:nvPr>
+        </p:nvSpPr>
+        <p:spPr/>
+        <p:txBody>
+          <a:bodyPr/>
+          <a:lstStyle/>
+          <a:p>
+            <a:endParaRPr lang="de-DE" dirty="0"/>
+          </a:p>
+        </p:txBody>
+      </p:sp>
+      <p:sp>
+        <p:nvSpPr>
+          <p:cNvPr id="4" name="Foliennummernplatzhalter 3">
+            <a:extLst>
+              <a:ext uri="{FF2B5EF4-FFF2-40B4-BE49-F238E27FC236}">
+                <a16:creationId xmlns:a16="http://schemas.microsoft.com/office/drawing/2014/main" id="{C2BA8F83-5EF2-341E-9942-5EE099C574E6}"/>
+              </a:ext>
+            </a:extLst>
+          </p:cNvPr>
+          <p:cNvSpPr>
+            <a:spLocks noGrp="1"/>
+          </p:cNvSpPr>
+          <p:nvPr>
+            <p:ph type="sldNum" sz="quarter" idx="12"/>
+          </p:nvPr>
+        </p:nvSpPr>
+        <p:spPr/>
+        <p:txBody>
+          <a:bodyPr/>
+          <a:lstStyle/>
+          <a:p>
+            <a:fld id="{08C366F5-AFAD-49CB-854A-9D9E238FCA13}" type="slidenum">
+              <a:rPr lang="en-GB" smtClean="0"/>
+              <a:t>7</a:t>
+            </a:fld>
+            <a:endParaRPr lang="en-GB"/>
+          </a:p>
+        </p:txBody>
+      </p:sp>
+    </p:spTree>
+    <p:extLst>
+      <p:ext uri="{BB962C8B-B14F-4D97-AF65-F5344CB8AC3E}">
         <p14:creationId xmlns:p14="http://schemas.microsoft.com/office/powerpoint/2010/main" val="1960105798"/>
+      </p:ext>
+    </p:extLst>
+  </p:cSld>
+  <p:clrMapOvr>
+    <a:masterClrMapping/>
+  </p:clrMapOvr>
+</p:sld>
+</file>
+
+<file path=ppt/slides/slide8.xml><?xml version="1.0" encoding="utf-8"?>
+<p:sld xmlns:a="http://schemas.openxmlformats.org/drawingml/2006/main" xmlns:r="http://schemas.openxmlformats.org/officeDocument/2006/relationships" xmlns:p="http://schemas.openxmlformats.org/presentationml/2006/main">
+  <p:cSld>
+    <p:spTree>
+      <p:nvGrpSpPr>
+        <p:cNvPr id="1" name=""/>
+        <p:cNvGrpSpPr/>
+        <p:nvPr/>
+      </p:nvGrpSpPr>
+      <p:grpSpPr>
+        <a:xfrm>
+          <a:off x="0" y="0"/>
+          <a:ext cx="0" cy="0"/>
+          <a:chOff x="0" y="0"/>
+          <a:chExt cx="0" cy="0"/>
+        </a:xfrm>
+      </p:grpSpPr>
+      <p:sp>
+        <p:nvSpPr>
+          <p:cNvPr id="2" name="Titel 1">
+            <a:extLst>
+              <a:ext uri="{FF2B5EF4-FFF2-40B4-BE49-F238E27FC236}">
+                <a16:creationId xmlns:a16="http://schemas.microsoft.com/office/drawing/2014/main" id="{75DDC2F6-AC9E-53E9-2C95-97D4C4520FFD}"/>
+              </a:ext>
+            </a:extLst>
+          </p:cNvPr>
+          <p:cNvSpPr>
+            <a:spLocks noGrp="1"/>
+          </p:cNvSpPr>
+          <p:nvPr>
+            <p:ph type="title"/>
+          </p:nvPr>
+        </p:nvSpPr>
+        <p:spPr/>
+        <p:txBody>
+          <a:bodyPr/>
+          <a:lstStyle/>
+          <a:p>
+            <a:r>
+              <a:rPr lang="de-DE" dirty="0"/>
+              <a:t>Imitation Learning </a:t>
+            </a:r>
+            <a:r>
+              <a:rPr lang="de-DE" dirty="0" err="1"/>
+              <a:t>for</a:t>
+            </a:r>
+            <a:r>
+              <a:rPr lang="de-DE" dirty="0"/>
+              <a:t> Robotics</a:t>
+            </a:r>
+          </a:p>
+        </p:txBody>
+      </p:sp>
+      <p:sp>
+        <p:nvSpPr>
+          <p:cNvPr id="3" name="Inhaltsplatzhalter 2">
+            <a:extLst>
+              <a:ext uri="{FF2B5EF4-FFF2-40B4-BE49-F238E27FC236}">
+                <a16:creationId xmlns:a16="http://schemas.microsoft.com/office/drawing/2014/main" id="{DA51C0E0-28DB-B62C-493A-BEA08CB49580}"/>
+              </a:ext>
+            </a:extLst>
+          </p:cNvPr>
+          <p:cNvSpPr>
+            <a:spLocks noGrp="1"/>
+          </p:cNvSpPr>
+          <p:nvPr>
+            <p:ph idx="1"/>
+          </p:nvPr>
+        </p:nvSpPr>
+        <p:spPr/>
+        <p:txBody>
+          <a:bodyPr/>
+          <a:lstStyle/>
+          <a:p>
+            <a:endParaRPr lang="de-DE"/>
+          </a:p>
+        </p:txBody>
+      </p:sp>
+      <p:sp>
+        <p:nvSpPr>
+          <p:cNvPr id="4" name="Foliennummernplatzhalter 3">
+            <a:extLst>
+              <a:ext uri="{FF2B5EF4-FFF2-40B4-BE49-F238E27FC236}">
+                <a16:creationId xmlns:a16="http://schemas.microsoft.com/office/drawing/2014/main" id="{4F5D3349-D3A7-79DB-55D1-081A0F11E8D6}"/>
+              </a:ext>
+            </a:extLst>
+          </p:cNvPr>
+          <p:cNvSpPr>
+            <a:spLocks noGrp="1"/>
+          </p:cNvSpPr>
+          <p:nvPr>
+            <p:ph type="sldNum" sz="quarter" idx="12"/>
+          </p:nvPr>
+        </p:nvSpPr>
+        <p:spPr/>
+        <p:txBody>
+          <a:bodyPr/>
+          <a:lstStyle/>
+          <a:p>
+            <a:fld id="{08C366F5-AFAD-49CB-854A-9D9E238FCA13}" type="slidenum">
+              <a:rPr lang="en-GB" smtClean="0"/>
+              <a:t>8</a:t>
+            </a:fld>
+            <a:endParaRPr lang="en-GB"/>
+          </a:p>
+        </p:txBody>
+      </p:sp>
+    </p:spTree>
+    <p:extLst>
+      <p:ext uri="{BB962C8B-B14F-4D97-AF65-F5344CB8AC3E}">
+        <p14:creationId xmlns:p14="http://schemas.microsoft.com/office/powerpoint/2010/main" val="3421645629"/>
+      </p:ext>
+    </p:extLst>
+  </p:cSld>
+  <p:clrMapOvr>
+    <a:masterClrMapping/>
+  </p:clrMapOvr>
+</p:sld>
+</file>
+
+<file path=ppt/slides/slide9.xml><?xml version="1.0" encoding="utf-8"?>
+<p:sld xmlns:a="http://schemas.openxmlformats.org/drawingml/2006/main" xmlns:r="http://schemas.openxmlformats.org/officeDocument/2006/relationships" xmlns:p="http://schemas.openxmlformats.org/presentationml/2006/main">
+  <p:cSld>
+    <p:spTree>
+      <p:nvGrpSpPr>
+        <p:cNvPr id="1" name=""/>
+        <p:cNvGrpSpPr/>
+        <p:nvPr/>
+      </p:nvGrpSpPr>
+      <p:grpSpPr>
+        <a:xfrm>
+          <a:off x="0" y="0"/>
+          <a:ext cx="0" cy="0"/>
+          <a:chOff x="0" y="0"/>
+          <a:chExt cx="0" cy="0"/>
+        </a:xfrm>
+      </p:grpSpPr>
+      <p:sp>
+        <p:nvSpPr>
+          <p:cNvPr id="2" name="Titel 1">
+            <a:extLst>
+              <a:ext uri="{FF2B5EF4-FFF2-40B4-BE49-F238E27FC236}">
+                <a16:creationId xmlns:a16="http://schemas.microsoft.com/office/drawing/2014/main" id="{BB527B4E-318F-01F3-DA5E-D552C9431BA0}"/>
+              </a:ext>
+            </a:extLst>
+          </p:cNvPr>
+          <p:cNvSpPr>
+            <a:spLocks noGrp="1"/>
+          </p:cNvSpPr>
+          <p:nvPr>
+            <p:ph type="title"/>
+          </p:nvPr>
+        </p:nvSpPr>
+        <p:spPr/>
+        <p:txBody>
+          <a:bodyPr/>
+          <a:lstStyle/>
+          <a:p>
+            <a:r>
+              <a:rPr lang="de-DE" dirty="0"/>
+              <a:t>Generalist Robot </a:t>
+            </a:r>
+            <a:r>
+              <a:rPr lang="de-DE" dirty="0" err="1"/>
+              <a:t>Policies</a:t>
+            </a:r>
+            <a:endParaRPr lang="de-DE" dirty="0"/>
+          </a:p>
+        </p:txBody>
+      </p:sp>
+      <p:sp>
+        <p:nvSpPr>
+          <p:cNvPr id="3" name="Inhaltsplatzhalter 2">
+            <a:extLst>
+              <a:ext uri="{FF2B5EF4-FFF2-40B4-BE49-F238E27FC236}">
+                <a16:creationId xmlns:a16="http://schemas.microsoft.com/office/drawing/2014/main" id="{0EDD8201-E814-754C-57A9-E0D3326CEC1E}"/>
+              </a:ext>
+            </a:extLst>
+          </p:cNvPr>
+          <p:cNvSpPr>
+            <a:spLocks noGrp="1"/>
+          </p:cNvSpPr>
+          <p:nvPr>
+            <p:ph idx="1"/>
+          </p:nvPr>
+        </p:nvSpPr>
+        <p:spPr/>
+        <p:txBody>
+          <a:bodyPr/>
+          <a:lstStyle/>
+          <a:p>
+            <a:r>
+              <a:rPr lang="de-DE" dirty="0"/>
+              <a:t>e.g., </a:t>
+            </a:r>
+            <a:r>
+              <a:rPr lang="de-DE" dirty="0" err="1"/>
+              <a:t>SmolVLA</a:t>
+            </a:r>
+            <a:endParaRPr lang="de-DE" dirty="0"/>
+          </a:p>
+        </p:txBody>
+      </p:sp>
+      <p:sp>
+        <p:nvSpPr>
+          <p:cNvPr id="4" name="Foliennummernplatzhalter 3">
+            <a:extLst>
+              <a:ext uri="{FF2B5EF4-FFF2-40B4-BE49-F238E27FC236}">
+                <a16:creationId xmlns:a16="http://schemas.microsoft.com/office/drawing/2014/main" id="{26BC5031-BD7E-00D2-C81A-AA5111B94CBE}"/>
+              </a:ext>
+            </a:extLst>
+          </p:cNvPr>
+          <p:cNvSpPr>
+            <a:spLocks noGrp="1"/>
+          </p:cNvSpPr>
+          <p:nvPr>
+            <p:ph type="sldNum" sz="quarter" idx="12"/>
+          </p:nvPr>
+        </p:nvSpPr>
+        <p:spPr/>
+        <p:txBody>
+          <a:bodyPr/>
+          <a:lstStyle/>
+          <a:p>
+            <a:fld id="{08C366F5-AFAD-49CB-854A-9D9E238FCA13}" type="slidenum">
+              <a:rPr lang="en-GB" smtClean="0"/>
+              <a:t>9</a:t>
+            </a:fld>
+            <a:endParaRPr lang="en-GB"/>
+          </a:p>
+        </p:txBody>
+      </p:sp>
+    </p:spTree>
+    <p:extLst>
+      <p:ext uri="{BB962C8B-B14F-4D97-AF65-F5344CB8AC3E}">
+        <p14:creationId xmlns:p14="http://schemas.microsoft.com/office/powerpoint/2010/main" val="3427472480"/>
       </p:ext>
     </p:extLst>
   </p:cSld>
